--- a/chapter9/parts/part-01-from-fundamentals-to-advanced/clip.pptx
+++ b/chapter9/parts/part-01-from-fundamentals-to-advanced/clip.pptx
@@ -4326,10 +4326,12 @@
           </a:bodyPr>
           <a:lstStyle/>
           <a:p>
-            <a:pPr>
+            <a:pPr lvl="0" marL="457200" indent="-228600">
+              <a:buFont typeface="Calibri"/>
               <a:spcAft>
                 <a:spcPts val="1000"/>
               </a:spcAft>
+              <a:buSzPct val="100000"/>
               <a:buChar char="•"/>
               <a:lnSpc>
                 <a:spcPts val="2200"/>
@@ -4346,10 +4348,12 @@
             </a:r>
           </a:p>
           <a:p>
-            <a:pPr>
+            <a:pPr lvl="0" marL="457200" indent="-228600">
+              <a:buFont typeface="Calibri"/>
               <a:spcAft>
                 <a:spcPts val="1000"/>
               </a:spcAft>
+              <a:buSzPct val="100000"/>
               <a:buChar char="•"/>
               <a:lnSpc>
                 <a:spcPts val="2200"/>
@@ -4485,10 +4489,12 @@
           </a:bodyPr>
           <a:lstStyle/>
           <a:p>
-            <a:pPr>
+            <a:pPr lvl="0" marL="457200" indent="-228600">
+              <a:buFont typeface="Calibri"/>
               <a:spcAft>
                 <a:spcPts val="1000"/>
               </a:spcAft>
+              <a:buSzPct val="100000"/>
               <a:buChar char="•"/>
               <a:lnSpc>
                 <a:spcPts val="2200"/>
@@ -4624,10 +4630,12 @@
           </a:bodyPr>
           <a:lstStyle/>
           <a:p>
-            <a:pPr>
+            <a:pPr lvl="0" marL="457200" indent="-228600">
+              <a:buFont typeface="Calibri"/>
               <a:spcAft>
                 <a:spcPts val="1000"/>
               </a:spcAft>
+              <a:buSzPct val="100000"/>
               <a:buChar char="•"/>
               <a:lnSpc>
                 <a:spcPts val="2200"/>
@@ -4644,10 +4652,12 @@
             </a:r>
           </a:p>
           <a:p>
-            <a:pPr>
+            <a:pPr lvl="0" marL="457200" indent="-228600">
+              <a:buFont typeface="Calibri"/>
               <a:spcAft>
                 <a:spcPts val="1000"/>
               </a:spcAft>
+              <a:buSzPct val="100000"/>
               <a:buChar char="•"/>
               <a:lnSpc>
                 <a:spcPts val="2200"/>
@@ -4664,10 +4674,12 @@
             </a:r>
           </a:p>
           <a:p>
-            <a:pPr>
+            <a:pPr lvl="0" marL="457200" indent="-228600">
+              <a:buFont typeface="Calibri"/>
               <a:spcAft>
                 <a:spcPts val="1000"/>
               </a:spcAft>
+              <a:buSzPct val="100000"/>
               <a:buChar char="•"/>
               <a:lnSpc>
                 <a:spcPts val="2200"/>
@@ -4803,10 +4815,12 @@
           </a:bodyPr>
           <a:lstStyle/>
           <a:p>
-            <a:pPr>
+            <a:pPr lvl="0" marL="457200" indent="-228600">
+              <a:buFont typeface="Calibri"/>
               <a:spcAft>
                 <a:spcPts val="1000"/>
               </a:spcAft>
+              <a:buSzPct val="100000"/>
               <a:buChar char="•"/>
               <a:lnSpc>
                 <a:spcPts val="2200"/>
@@ -4823,10 +4837,12 @@
             </a:r>
           </a:p>
           <a:p>
-            <a:pPr>
+            <a:pPr lvl="0" marL="457200" indent="-228600">
+              <a:buFont typeface="Calibri"/>
               <a:spcAft>
                 <a:spcPts val="1000"/>
               </a:spcAft>
+              <a:buSzPct val="100000"/>
               <a:buChar char="•"/>
               <a:lnSpc>
                 <a:spcPts val="2200"/>
@@ -4843,10 +4859,12 @@
             </a:r>
           </a:p>
           <a:p>
-            <a:pPr>
+            <a:pPr lvl="0" marL="457200" indent="-228600">
+              <a:buFont typeface="Calibri"/>
               <a:spcAft>
                 <a:spcPts val="1000"/>
               </a:spcAft>
+              <a:buSzPct val="100000"/>
               <a:buChar char="•"/>
               <a:lnSpc>
                 <a:spcPts val="2200"/>
@@ -4863,10 +4881,12 @@
             </a:r>
           </a:p>
           <a:p>
-            <a:pPr>
+            <a:pPr lvl="0" marL="457200" indent="-228600">
+              <a:buFont typeface="Calibri"/>
               <a:spcAft>
                 <a:spcPts val="1000"/>
               </a:spcAft>
+              <a:buSzPct val="100000"/>
               <a:buChar char="•"/>
               <a:lnSpc>
                 <a:spcPts val="2200"/>
@@ -4883,10 +4903,12 @@
             </a:r>
           </a:p>
           <a:p>
-            <a:pPr>
+            <a:pPr lvl="0" marL="457200" indent="-228600">
+              <a:buFont typeface="Calibri"/>
               <a:spcAft>
                 <a:spcPts val="1000"/>
               </a:spcAft>
+              <a:buSzPct val="100000"/>
               <a:buChar char="•"/>
               <a:lnSpc>
                 <a:spcPts val="2200"/>
@@ -4903,10 +4925,12 @@
             </a:r>
           </a:p>
           <a:p>
-            <a:pPr>
+            <a:pPr lvl="0" marL="457200" indent="-228600">
+              <a:buFont typeface="Calibri"/>
               <a:spcAft>
                 <a:spcPts val="1000"/>
               </a:spcAft>
+              <a:buSzPct val="100000"/>
               <a:buChar char="•"/>
               <a:lnSpc>
                 <a:spcPts val="2200"/>
@@ -5042,10 +5066,12 @@
           </a:bodyPr>
           <a:lstStyle/>
           <a:p>
-            <a:pPr>
+            <a:pPr lvl="0" marL="457200" indent="-228600">
+              <a:buFont typeface="Calibri"/>
               <a:spcAft>
                 <a:spcPts val="1000"/>
               </a:spcAft>
+              <a:buSzPct val="100000"/>
               <a:buChar char="•"/>
               <a:lnSpc>
                 <a:spcPts val="2200"/>
@@ -5062,10 +5088,12 @@
             </a:r>
           </a:p>
           <a:p>
-            <a:pPr>
+            <a:pPr lvl="0" marL="457200" indent="-228600">
+              <a:buFont typeface="Calibri"/>
               <a:spcAft>
                 <a:spcPts val="1000"/>
               </a:spcAft>
+              <a:buSzPct val="100000"/>
               <a:buChar char="•"/>
               <a:lnSpc>
                 <a:spcPts val="2200"/>
@@ -5082,10 +5110,12 @@
             </a:r>
           </a:p>
           <a:p>
-            <a:pPr>
+            <a:pPr lvl="0" marL="457200" indent="-228600">
+              <a:buFont typeface="Calibri"/>
               <a:spcAft>
                 <a:spcPts val="1000"/>
               </a:spcAft>
+              <a:buSzPct val="100000"/>
               <a:buChar char="•"/>
               <a:lnSpc>
                 <a:spcPts val="2200"/>
@@ -5221,10 +5251,12 @@
           </a:bodyPr>
           <a:lstStyle/>
           <a:p>
-            <a:pPr>
+            <a:pPr lvl="0" marL="457200" indent="-228600">
+              <a:buFont typeface="Calibri"/>
               <a:spcAft>
                 <a:spcPts val="1000"/>
               </a:spcAft>
+              <a:buSzPct val="100000"/>
               <a:buChar char="•"/>
               <a:lnSpc>
                 <a:spcPts val="2200"/>
@@ -5241,10 +5273,12 @@
             </a:r>
           </a:p>
           <a:p>
-            <a:pPr>
+            <a:pPr lvl="0" marL="457200" indent="-228600">
+              <a:buFont typeface="Calibri"/>
               <a:spcAft>
                 <a:spcPts val="1000"/>
               </a:spcAft>
+              <a:buSzPct val="100000"/>
               <a:buChar char="•"/>
               <a:lnSpc>
                 <a:spcPts val="2200"/>
@@ -5261,10 +5295,12 @@
             </a:r>
           </a:p>
           <a:p>
-            <a:pPr>
+            <a:pPr lvl="0" marL="457200" indent="-228600">
+              <a:buFont typeface="Calibri"/>
               <a:spcAft>
                 <a:spcPts val="1000"/>
               </a:spcAft>
+              <a:buSzPct val="100000"/>
               <a:buChar char="•"/>
               <a:lnSpc>
                 <a:spcPts val="2200"/>
@@ -5281,10 +5317,12 @@
             </a:r>
           </a:p>
           <a:p>
-            <a:pPr>
+            <a:pPr lvl="0" marL="457200" indent="-228600">
+              <a:buFont typeface="Calibri"/>
               <a:spcAft>
                 <a:spcPts val="1000"/>
               </a:spcAft>
+              <a:buSzPct val="100000"/>
               <a:buChar char="•"/>
               <a:lnSpc>
                 <a:spcPts val="2200"/>
@@ -5301,10 +5339,12 @@
             </a:r>
           </a:p>
           <a:p>
-            <a:pPr>
+            <a:pPr lvl="0" marL="457200" indent="-228600">
+              <a:buFont typeface="Calibri"/>
               <a:spcAft>
                 <a:spcPts val="1000"/>
               </a:spcAft>
+              <a:buSzPct val="100000"/>
               <a:buChar char="•"/>
               <a:lnSpc>
                 <a:spcPts val="2200"/>
@@ -5321,10 +5361,12 @@
             </a:r>
           </a:p>
           <a:p>
-            <a:pPr>
+            <a:pPr lvl="0" marL="457200" indent="-228600">
+              <a:buFont typeface="Calibri"/>
               <a:spcAft>
                 <a:spcPts val="1000"/>
               </a:spcAft>
+              <a:buSzPct val="100000"/>
               <a:buChar char="•"/>
               <a:lnSpc>
                 <a:spcPts val="2200"/>
@@ -5460,10 +5502,12 @@
           </a:bodyPr>
           <a:lstStyle/>
           <a:p>
-            <a:pPr>
+            <a:pPr lvl="0" marL="457200" indent="-228600">
+              <a:buFont typeface="Calibri"/>
               <a:spcAft>
                 <a:spcPts val="1000"/>
               </a:spcAft>
+              <a:buSzPct val="100000"/>
               <a:buChar char="•"/>
               <a:lnSpc>
                 <a:spcPts val="2200"/>
@@ -5480,10 +5524,12 @@
             </a:r>
           </a:p>
           <a:p>
-            <a:pPr>
+            <a:pPr lvl="0" marL="457200" indent="-228600">
+              <a:buFont typeface="Calibri"/>
               <a:spcAft>
                 <a:spcPts val="1000"/>
               </a:spcAft>
+              <a:buSzPct val="100000"/>
               <a:buChar char="•"/>
               <a:lnSpc>
                 <a:spcPts val="2200"/>
@@ -5500,10 +5546,12 @@
             </a:r>
           </a:p>
           <a:p>
-            <a:pPr>
+            <a:pPr lvl="0" marL="457200" indent="-228600">
+              <a:buFont typeface="Calibri"/>
               <a:spcAft>
                 <a:spcPts val="1000"/>
               </a:spcAft>
+              <a:buSzPct val="100000"/>
               <a:buChar char="•"/>
               <a:lnSpc>
                 <a:spcPts val="2200"/>
@@ -5639,10 +5687,12 @@
           </a:bodyPr>
           <a:lstStyle/>
           <a:p>
-            <a:pPr>
+            <a:pPr lvl="0" marL="457200" indent="-228600">
+              <a:buFont typeface="Calibri"/>
               <a:spcAft>
                 <a:spcPts val="1000"/>
               </a:spcAft>
+              <a:buSzPct val="100000"/>
               <a:buChar char="•"/>
               <a:lnSpc>
                 <a:spcPts val="2200"/>
@@ -5659,10 +5709,12 @@
             </a:r>
           </a:p>
           <a:p>
-            <a:pPr>
+            <a:pPr lvl="0" marL="457200" indent="-228600">
+              <a:buFont typeface="Calibri"/>
               <a:spcAft>
                 <a:spcPts val="1000"/>
               </a:spcAft>
+              <a:buSzPct val="100000"/>
               <a:buChar char="•"/>
               <a:lnSpc>
                 <a:spcPts val="2200"/>
@@ -5679,10 +5731,12 @@
             </a:r>
           </a:p>
           <a:p>
-            <a:pPr>
+            <a:pPr lvl="0" marL="457200" indent="-228600">
+              <a:buFont typeface="Calibri"/>
               <a:spcAft>
                 <a:spcPts val="1000"/>
               </a:spcAft>
+              <a:buSzPct val="100000"/>
               <a:buChar char="•"/>
               <a:lnSpc>
                 <a:spcPts val="2200"/>
@@ -5699,10 +5753,12 @@
             </a:r>
           </a:p>
           <a:p>
-            <a:pPr>
+            <a:pPr lvl="0" marL="457200" indent="-228600">
+              <a:buFont typeface="Calibri"/>
               <a:spcAft>
                 <a:spcPts val="1000"/>
               </a:spcAft>
+              <a:buSzPct val="100000"/>
               <a:buChar char="•"/>
               <a:lnSpc>
                 <a:spcPts val="2200"/>
@@ -5719,10 +5775,12 @@
             </a:r>
           </a:p>
           <a:p>
-            <a:pPr>
+            <a:pPr lvl="0" marL="457200" indent="-228600">
+              <a:buFont typeface="Calibri"/>
               <a:spcAft>
                 <a:spcPts val="1000"/>
               </a:spcAft>
+              <a:buSzPct val="100000"/>
               <a:buChar char="•"/>
               <a:lnSpc>
                 <a:spcPts val="2200"/>
@@ -5858,10 +5916,12 @@
           </a:bodyPr>
           <a:lstStyle/>
           <a:p>
-            <a:pPr>
+            <a:pPr lvl="0" marL="457200" indent="-228600">
+              <a:buFont typeface="Calibri"/>
               <a:spcAft>
                 <a:spcPts val="1000"/>
               </a:spcAft>
+              <a:buSzPct val="100000"/>
               <a:buChar char="•"/>
               <a:lnSpc>
                 <a:spcPts val="2200"/>
@@ -5878,10 +5938,12 @@
             </a:r>
           </a:p>
           <a:p>
-            <a:pPr>
+            <a:pPr lvl="0" marL="457200" indent="-228600">
+              <a:buFont typeface="Calibri"/>
               <a:spcAft>
                 <a:spcPts val="1000"/>
               </a:spcAft>
+              <a:buSzPct val="100000"/>
               <a:buChar char="•"/>
               <a:lnSpc>
                 <a:spcPts val="2200"/>
@@ -5898,10 +5960,12 @@
             </a:r>
           </a:p>
           <a:p>
-            <a:pPr>
+            <a:pPr lvl="0" marL="457200" indent="-228600">
+              <a:buFont typeface="Calibri"/>
               <a:spcAft>
                 <a:spcPts val="1000"/>
               </a:spcAft>
+              <a:buSzPct val="100000"/>
               <a:buChar char="•"/>
               <a:lnSpc>
                 <a:spcPts val="2200"/>
